--- a/Foundation_F2/Workshop/F2-W05_Apply_Workshop_L09-L10_Identity_Interview.pptx
+++ b/Foundation_F2/Workshop/F2-W05_Apply_Workshop_L09-L10_Identity_Interview.pptx
@@ -5106,7 +5106,7 @@
                 <a:latin typeface="Calibri" pitchFamily="34" charset="0"/>
                 <a:cs typeface="Amiri" pitchFamily="2" charset="-78"/>
               </a:rPr>
-              <a:t>Round 1: read it in pairs. Round 2: swap letters. Round 3: A retells B’s answers to the group with “she”: </a:t>
+              <a:t>Round 1: read it in pairs. Round 2: swap letters. Round 3: A retells B’s answers to the group with “she”: ‏</a:t>
             </a:r>
             <a:pPr algn="l" indent="0" marL="0">
               <a:buNone/>
@@ -5133,7 +5133,7 @@
                 <a:latin typeface="Calibri" pitchFamily="34" charset="0"/>
                 <a:cs typeface="Amiri" pitchFamily="2" charset="-78"/>
               </a:rPr>
-              <a:t> …</a:t>
+              <a:t> …‏</a:t>
             </a:r>
             <a:endParaRPr lang="en-US" sz="1150" dirty="0"/>
           </a:p>
@@ -7459,7 +7459,7 @@
                 <a:latin typeface="Calibri" pitchFamily="34" charset="0"/>
                 <a:cs typeface="Amiri" pitchFamily="2" charset="-78"/>
               </a:rPr>
-              <a:t>Odd numbers come from F2-L09, even numbers from F2-L10. Core: a full sentence from the starter. Develop: add the “more” part. Stretch: link two answers with </a:t>
+              <a:t>Odd numbers come from F2-L09, even numbers from F2-L10. Core: a full sentence from the starter. Develop: add the “more” part. Stretch: link two answers with ‏</a:t>
             </a:r>
             <a:pPr algn="l" indent="0" marL="0">
               <a:buNone/>
@@ -7486,7 +7486,7 @@
                 <a:latin typeface="Calibri" pitchFamily="34" charset="0"/>
                 <a:cs typeface="Amiri" pitchFamily="2" charset="-78"/>
               </a:rPr>
-              <a:t>, </a:t>
+              <a:t>‏, ‏</a:t>
             </a:r>
             <a:pPr algn="l" indent="0" marL="0">
               <a:buNone/>
@@ -7513,7 +7513,7 @@
                 <a:latin typeface="Calibri" pitchFamily="34" charset="0"/>
                 <a:cs typeface="Amiri" pitchFamily="2" charset="-78"/>
               </a:rPr>
-              <a:t> or </a:t>
+              <a:t>‏ or ‏</a:t>
             </a:r>
             <a:pPr algn="l" indent="0" marL="0">
               <a:buNone/>
@@ -7540,7 +7540,7 @@
                 <a:latin typeface="Calibri" pitchFamily="34" charset="0"/>
                 <a:cs typeface="Amiri" pitchFamily="2" charset="-78"/>
               </a:rPr>
-              <a:t>. Swap after each question.</a:t>
+              <a:t>‏. Swap after each question.</a:t>
             </a:r>
             <a:endParaRPr lang="en-US" sz="1100" dirty="0"/>
           </a:p>
@@ -10866,7 +10866,7 @@
                 <a:latin typeface="Calibri" pitchFamily="34" charset="0"/>
                 <a:cs typeface="Amiri" pitchFamily="2" charset="-78"/>
               </a:rPr>
-              <a:t>Add a custom: </a:t>
+              <a:t>Add a custom: ‏</a:t>
             </a:r>
             <a:pPr algn="l" indent="0" marL="0">
               <a:buNone/>
@@ -10893,7 +10893,7 @@
                 <a:latin typeface="Calibri" pitchFamily="34" charset="0"/>
                 <a:cs typeface="Amiri" pitchFamily="2" charset="-78"/>
               </a:rPr>
-              <a:t> …</a:t>
+              <a:t> …‏</a:t>
             </a:r>
             <a:endParaRPr lang="en-US" sz="1150" dirty="0"/>
           </a:p>
@@ -11030,7 +11030,7 @@
                 <a:latin typeface="Calibri" pitchFamily="34" charset="0"/>
                 <a:cs typeface="Amiri" pitchFamily="2" charset="-78"/>
               </a:rPr>
-              <a:t>Add </a:t>
+              <a:t>Add ‏</a:t>
             </a:r>
             <a:pPr algn="l" indent="0" marL="0">
               <a:buNone/>
@@ -11057,7 +11057,7 @@
                 <a:latin typeface="Calibri" pitchFamily="34" charset="0"/>
                 <a:cs typeface="Amiri" pitchFamily="2" charset="-78"/>
               </a:rPr>
-              <a:t> … and one thing that is similar (</a:t>
+              <a:t> …‏ and one thing that is similar (‏</a:t>
             </a:r>
             <a:pPr algn="l" indent="0" marL="0">
               <a:buNone/>
@@ -11084,7 +11084,7 @@
                 <a:latin typeface="Calibri" pitchFamily="34" charset="0"/>
                 <a:cs typeface="Amiri" pitchFamily="2" charset="-78"/>
               </a:rPr>
-              <a:t>) or different (</a:t>
+              <a:t>‏) or different (‏</a:t>
             </a:r>
             <a:pPr algn="l" indent="0" marL="0">
               <a:buNone/>
@@ -11111,7 +11111,7 @@
                 <a:latin typeface="Calibri" pitchFamily="34" charset="0"/>
                 <a:cs typeface="Amiri" pitchFamily="2" charset="-78"/>
               </a:rPr>
-              <a:t>).</a:t>
+              <a:t>‏).</a:t>
             </a:r>
             <a:endParaRPr lang="en-US" sz="1150" dirty="0"/>
           </a:p>
@@ -17501,7 +17501,7 @@
                 <a:latin typeface="Calibri" pitchFamily="34" charset="0"/>
                 <a:cs typeface="Amiri" pitchFamily="2" charset="-78"/>
               </a:rPr>
-              <a:t>She → ta-: </a:t>
+              <a:t>She → ta-: ‏</a:t>
             </a:r>
             <a:pPr algn="l" indent="0" marL="0">
               <a:buNone/>
@@ -17528,7 +17528,7 @@
                 <a:latin typeface="Calibri" pitchFamily="34" charset="0"/>
                 <a:cs typeface="Amiri" pitchFamily="2" charset="-78"/>
               </a:rPr>
-              <a:t>.</a:t>
+              <a:t>‏.</a:t>
             </a:r>
             <a:endParaRPr lang="en-US" sz="1150" dirty="0"/>
           </a:p>
@@ -17732,6 +17732,19 @@
               <a:buNone/>
             </a:pPr>
             <a:r>
+              <a:rPr lang="en-US" sz="1150" b="1" dirty="0">
+                <a:solidFill>
+                  <a:srgbClr val="1B3B6F"/>
+                </a:solidFill>
+                <a:latin typeface="Calibri" pitchFamily="34" charset="0"/>
+                <a:cs typeface="Amiri" pitchFamily="2" charset="-78"/>
+              </a:rPr>
+              <a:t>‏</a:t>
+            </a:r>
+            <a:pPr algn="l" indent="0" marL="0">
+              <a:buNone/>
+            </a:pPr>
+            <a:r>
               <a:rPr lang="ar-SA" altLang="en-US" sz="1500" b="1" dirty="0">
                 <a:solidFill>
                   <a:srgbClr val="1B3B6F"/>
@@ -17753,7 +17766,7 @@
                 <a:latin typeface="Calibri" pitchFamily="34" charset="0"/>
                 <a:cs typeface="Amiri" pitchFamily="2" charset="-78"/>
               </a:rPr>
-              <a:t> needs bi-: </a:t>
+              <a:t>‏ needs bi-: ‏</a:t>
             </a:r>
             <a:pPr algn="l" indent="0" marL="0">
               <a:buNone/>
@@ -17780,7 +17793,7 @@
                 <a:latin typeface="Calibri" pitchFamily="34" charset="0"/>
                 <a:cs typeface="Amiri" pitchFamily="2" charset="-78"/>
               </a:rPr>
-              <a:t>.</a:t>
+              <a:t>‏.</a:t>
             </a:r>
             <a:endParaRPr lang="en-US" sz="1150" dirty="0"/>
           </a:p>
@@ -17994,7 +18007,7 @@
                 <a:latin typeface="Calibri" pitchFamily="34" charset="0"/>
                 <a:cs typeface="Amiri" pitchFamily="2" charset="-78"/>
               </a:rPr>
-              <a:t>His age → </a:t>
+              <a:t>His age → ‏</a:t>
             </a:r>
             <a:pPr algn="l" indent="0" marL="0">
               <a:buNone/>
@@ -18021,7 +18034,7 @@
                 <a:latin typeface="Calibri" pitchFamily="34" charset="0"/>
                 <a:cs typeface="Amiri" pitchFamily="2" charset="-78"/>
               </a:rPr>
-              <a:t>.</a:t>
+              <a:t>‏.</a:t>
             </a:r>
             <a:endParaRPr lang="en-US" sz="1150" dirty="0"/>
           </a:p>
@@ -20221,7 +20234,7 @@
                 <a:latin typeface="Calibri" pitchFamily="34" charset="0"/>
                 <a:cs typeface="Amiri" pitchFamily="2" charset="-78"/>
               </a:rPr>
-              <a:t>☐  At least one </a:t>
+              <a:t>☐  At least one ‏</a:t>
             </a:r>
             <a:pPr algn="l" indent="0" marL="0">
               <a:buNone/>
@@ -20248,7 +20261,7 @@
                 <a:latin typeface="Calibri" pitchFamily="34" charset="0"/>
                 <a:cs typeface="Amiri" pitchFamily="2" charset="-78"/>
               </a:rPr>
-              <a:t> and one </a:t>
+              <a:t>‏ and one ‏</a:t>
             </a:r>
             <a:pPr algn="l" indent="0" marL="0">
               <a:buNone/>
@@ -20275,7 +20288,7 @@
                 <a:latin typeface="Calibri" pitchFamily="34" charset="0"/>
                 <a:cs typeface="Amiri" pitchFamily="2" charset="-78"/>
               </a:rPr>
-              <a:t> (Develop).</a:t>
+              <a:t>‏ (Develop).</a:t>
             </a:r>
             <a:endParaRPr lang="en-US" sz="1200" dirty="0"/>
           </a:p>
@@ -23823,7 +23836,7 @@
                 <a:latin typeface="Calibri" pitchFamily="34" charset="0"/>
                 <a:cs typeface="Amiri" pitchFamily="2" charset="-78"/>
               </a:rPr>
-              <a:t>use </a:t>
+              <a:t>use ‏</a:t>
             </a:r>
             <a:pPr algn="l" indent="0" marL="0">
               <a:buNone/>
@@ -23850,7 +23863,7 @@
                 <a:latin typeface="Calibri" pitchFamily="34" charset="0"/>
                 <a:cs typeface="Amiri" pitchFamily="2" charset="-78"/>
               </a:rPr>
-              <a:t> verbs (</a:t>
+              <a:t>‏ verbs (‏</a:t>
             </a:r>
             <a:pPr algn="l" indent="0" marL="0">
               <a:buNone/>
@@ -23904,7 +23917,7 @@
                 <a:latin typeface="Calibri" pitchFamily="34" charset="0"/>
                 <a:cs typeface="Amiri" pitchFamily="2" charset="-78"/>
               </a:rPr>
-              <a:t>) and </a:t>
+              <a:t>‏) and ‏</a:t>
             </a:r>
             <a:pPr algn="l" indent="0" marL="0">
               <a:buNone/>
@@ -23931,7 +23944,7 @@
                 <a:latin typeface="Calibri" pitchFamily="34" charset="0"/>
                 <a:cs typeface="Amiri" pitchFamily="2" charset="-78"/>
               </a:rPr>
-              <a:t> + bi- correctly?</a:t>
+              <a:t>‏ + bi- correctly?</a:t>
             </a:r>
             <a:endParaRPr lang="en-US" sz="1100" dirty="0"/>
           </a:p>
@@ -24090,7 +24103,7 @@
                 <a:latin typeface="Calibri" pitchFamily="34" charset="0"/>
                 <a:cs typeface="Amiri" pitchFamily="2" charset="-78"/>
               </a:rPr>
-              <a:t>use linking words (</a:t>
+              <a:t>use linking words (‏</a:t>
             </a:r>
             <a:pPr algn="l" indent="0" marL="0">
               <a:buNone/>
@@ -24198,7 +24211,7 @@
                 <a:latin typeface="Calibri" pitchFamily="34" charset="0"/>
                 <a:cs typeface="Amiri" pitchFamily="2" charset="-78"/>
               </a:rPr>
-              <a:t>)?</a:t>
+              <a:t>‏)?</a:t>
             </a:r>
             <a:endParaRPr lang="en-US" sz="1100" dirty="0"/>
           </a:p>
@@ -28147,7 +28160,7 @@
                 <a:latin typeface="Calibri" pitchFamily="34" charset="0"/>
                 <a:cs typeface="Amiri" pitchFamily="2" charset="-78"/>
               </a:rPr>
-              <a:t>I added reasons (</a:t>
+              <a:t>I added reasons (‏</a:t>
             </a:r>
             <a:pPr algn="l" indent="0" marL="0">
               <a:buNone/>
@@ -28174,7 +28187,7 @@
                 <a:latin typeface="Calibri" pitchFamily="34" charset="0"/>
                 <a:cs typeface="Amiri" pitchFamily="2" charset="-78"/>
               </a:rPr>
-              <a:t>) and extra details without frames.</a:t>
+              <a:t>‏) and extra details without frames.</a:t>
             </a:r>
             <a:endParaRPr lang="en-US" sz="1300" dirty="0"/>
           </a:p>
@@ -32302,7 +32315,7 @@
                 <a:latin typeface="Calibri" pitchFamily="34" charset="0"/>
                 <a:cs typeface="Amiri" pitchFamily="2" charset="-78"/>
               </a:rPr>
-              <a:t>☐  Add a reason (</a:t>
+              <a:t>☐  Add a reason (‏</a:t>
             </a:r>
             <a:pPr algn="l" indent="0" marL="0">
               <a:buNone/>
@@ -32329,7 +32342,7 @@
                 <a:latin typeface="Calibri" pitchFamily="34" charset="0"/>
                 <a:cs typeface="Amiri" pitchFamily="2" charset="-78"/>
               </a:rPr>
-              <a:t>) and an extra detail to every point.</a:t>
+              <a:t>‏) and an extra detail to every point.</a:t>
             </a:r>
             <a:endParaRPr lang="en-US" sz="1300" dirty="0"/>
           </a:p>
@@ -33850,7 +33863,7 @@
                 <a:latin typeface="Calibri" pitchFamily="34" charset="0"/>
                 <a:cs typeface="Amiri" pitchFamily="2" charset="-78"/>
               </a:rPr>
-              <a:t>Join a word from each lesson in one sentence with </a:t>
+              <a:t>Join a word from each lesson in one sentence with ‏</a:t>
             </a:r>
             <a:pPr algn="l" indent="0" marL="0">
               <a:buNone/>
@@ -33877,7 +33890,7 @@
                 <a:latin typeface="Calibri" pitchFamily="34" charset="0"/>
                 <a:cs typeface="Amiri" pitchFamily="2" charset="-78"/>
               </a:rPr>
-              <a:t> or </a:t>
+              <a:t>‏ or ‏</a:t>
             </a:r>
             <a:pPr algn="l" indent="0" marL="0">
               <a:buNone/>
@@ -33904,7 +33917,7 @@
                 <a:latin typeface="Calibri" pitchFamily="34" charset="0"/>
                 <a:cs typeface="Amiri" pitchFamily="2" charset="-78"/>
               </a:rPr>
-              <a:t>.</a:t>
+              <a:t>‏.</a:t>
             </a:r>
             <a:endParaRPr lang="en-US" sz="1150" dirty="0"/>
           </a:p>
@@ -38667,7 +38680,7 @@
                 <a:latin typeface="Calibri" pitchFamily="34" charset="0"/>
                 <a:cs typeface="Amiri" pitchFamily="2" charset="-78"/>
               </a:rPr>
-              <a:t>Guest: </a:t>
+              <a:t>Guest: ‏</a:t>
             </a:r>
             <a:pPr algn="l" indent="0" marL="0">
               <a:buNone/>
@@ -38682,6 +38695,19 @@
                 <a:cs typeface="Amiri" pitchFamily="2" charset="-78"/>
               </a:rPr>
               <a:t>ضَيْفٌ / ضَيْفَةٌ / ضُيُوفٌ</a:t>
+            </a:r>
+            <a:pPr algn="l" indent="0" marL="0">
+              <a:buNone/>
+            </a:pPr>
+            <a:r>
+              <a:rPr lang="en-US" sz="1000" i="1" dirty="0">
+                <a:solidFill>
+                  <a:srgbClr val="8A6D1E"/>
+                </a:solidFill>
+                <a:latin typeface="Calibri" pitchFamily="34" charset="0"/>
+                <a:cs typeface="Amiri" pitchFamily="2" charset="-78"/>
+              </a:rPr>
+              <a:t>‏</a:t>
             </a:r>
             <a:endParaRPr lang="en-US" sz="1000" dirty="0"/>
           </a:p>
@@ -39032,6 +39058,19 @@
               <a:buNone/>
             </a:pPr>
             <a:r>
+              <a:rPr lang="en-US" sz="1000" i="1" dirty="0">
+                <a:solidFill>
+                  <a:srgbClr val="8A6D1E"/>
+                </a:solidFill>
+                <a:latin typeface="Calibri" pitchFamily="34" charset="0"/>
+                <a:cs typeface="Amiri" pitchFamily="2" charset="-78"/>
+              </a:rPr>
+              <a:t>‏</a:t>
+            </a:r>
+            <a:pPr algn="l" indent="0" marL="0">
+              <a:buNone/>
+            </a:pPr>
+            <a:r>
               <a:rPr lang="ar-SA" altLang="en-US" sz="1300" dirty="0">
                 <a:solidFill>
                   <a:srgbClr val="8A6D1E"/>
@@ -39053,7 +39092,7 @@
                 <a:latin typeface="Calibri" pitchFamily="34" charset="0"/>
                 <a:cs typeface="Amiri" pitchFamily="2" charset="-78"/>
               </a:rPr>
-              <a:t>. (diverse)</a:t>
+              <a:t>‏. (diverse)</a:t>
             </a:r>
             <a:endParaRPr lang="en-US" sz="1000" dirty="0"/>
           </a:p>
@@ -39978,7 +40017,7 @@
                 <a:latin typeface="Calibri" pitchFamily="34" charset="0"/>
                 <a:cs typeface="Amiri" pitchFamily="2" charset="-78"/>
               </a:rPr>
-              <a:t>f.: </a:t>
+              <a:t>f.: ‏</a:t>
             </a:r>
             <a:pPr algn="l" indent="0" marL="0">
               <a:buNone/>
@@ -40020,6 +40059,19 @@
                 <a:cs typeface="Amiri" pitchFamily="2" charset="-78"/>
               </a:rPr>
               <a:t>مُخْتَلِفَةٌ</a:t>
+            </a:r>
+            <a:pPr algn="l" indent="0" marL="0">
+              <a:buNone/>
+            </a:pPr>
+            <a:r>
+              <a:rPr lang="en-US" sz="1000" i="1" dirty="0">
+                <a:solidFill>
+                  <a:srgbClr val="8A6D1E"/>
+                </a:solidFill>
+                <a:latin typeface="Calibri" pitchFamily="34" charset="0"/>
+                <a:cs typeface="Amiri" pitchFamily="2" charset="-78"/>
+              </a:rPr>
+              <a:t>‏</a:t>
             </a:r>
             <a:endParaRPr lang="en-US" sz="1000" dirty="0"/>
           </a:p>
